--- a/126/NMOP/draft-ietf-nmop-network-anomaly-architecture-semantics-lifecycle.pptx
+++ b/126/NMOP/draft-ietf-nmop-network-anomaly-architecture-semantics-lifecycle.pptx
@@ -158,7 +158,7 @@
 <file path=ppt/revisionInfo.xml><?xml version="1.0" encoding="utf-8"?>
 <p1510:revInfo xmlns:a="http://schemas.openxmlformats.org/drawingml/2006/main" xmlns:r="http://schemas.openxmlformats.org/officeDocument/2006/relationships" xmlns:p1510="http://schemas.microsoft.com/office/powerpoint/2015/10/main">
   <p1510:revLst>
-    <p1510:client id="{3AD322F0-B64B-49A1-B7C6-4FDEC2911437}" v="39" dt="2026-07-11T08:34:52.855"/>
+    <p1510:client id="{3AD322F0-B64B-49A1-B7C6-4FDEC2911437}" v="51" dt="2026-07-11T08:46:15.205"/>
   </p1510:revLst>
 </p1510:revInfo>
 </file>
@@ -168,7 +168,7 @@
   <pc:docChgLst>
     <pc:chgData name="Graf Thomas, SCS-INI-NET-VNC-E2E" userId="487bc3e3-9ce7-4cdd-b7b4-8899ea88d289" providerId="ADAL" clId="{ADEEF08A-D719-4B50-A383-4105EDA2C206}"/>
     <pc:docChg chg="undo redo custSel delSld modSld">
-      <pc:chgData name="Graf Thomas, SCS-INI-NET-VNC-E2E" userId="487bc3e3-9ce7-4cdd-b7b4-8899ea88d289" providerId="ADAL" clId="{ADEEF08A-D719-4B50-A383-4105EDA2C206}" dt="2026-07-11T08:34:58.302" v="1249" actId="20577"/>
+      <pc:chgData name="Graf Thomas, SCS-INI-NET-VNC-E2E" userId="487bc3e3-9ce7-4cdd-b7b4-8899ea88d289" providerId="ADAL" clId="{ADEEF08A-D719-4B50-A383-4105EDA2C206}" dt="2026-07-11T08:46:16.481" v="1317" actId="20577"/>
       <pc:docMkLst>
         <pc:docMk/>
       </pc:docMkLst>
@@ -227,7 +227,7 @@
         </pc:spChg>
       </pc:sldChg>
       <pc:sldChg chg="modSp mod">
-        <pc:chgData name="Graf Thomas, SCS-INI-NET-VNC-E2E" userId="487bc3e3-9ce7-4cdd-b7b4-8899ea88d289" providerId="ADAL" clId="{ADEEF08A-D719-4B50-A383-4105EDA2C206}" dt="2026-07-11T08:34:41.081" v="1245" actId="20577"/>
+        <pc:chgData name="Graf Thomas, SCS-INI-NET-VNC-E2E" userId="487bc3e3-9ce7-4cdd-b7b4-8899ea88d289" providerId="ADAL" clId="{ADEEF08A-D719-4B50-A383-4105EDA2C206}" dt="2026-07-11T08:45:45.793" v="1300" actId="20577"/>
         <pc:sldMkLst>
           <pc:docMk/>
           <pc:sldMk cId="3767000517" sldId="2145706307"/>
@@ -249,7 +249,7 @@
           </ac:spMkLst>
         </pc:spChg>
         <pc:spChg chg="mod">
-          <ac:chgData name="Graf Thomas, SCS-INI-NET-VNC-E2E" userId="487bc3e3-9ce7-4cdd-b7b4-8899ea88d289" providerId="ADAL" clId="{ADEEF08A-D719-4B50-A383-4105EDA2C206}" dt="2026-07-11T08:30:40.850" v="1214" actId="14100"/>
+          <ac:chgData name="Graf Thomas, SCS-INI-NET-VNC-E2E" userId="487bc3e3-9ce7-4cdd-b7b4-8899ea88d289" providerId="ADAL" clId="{ADEEF08A-D719-4B50-A383-4105EDA2C206}" dt="2026-07-11T08:45:45.793" v="1300" actId="20577"/>
           <ac:spMkLst>
             <pc:docMk/>
             <pc:sldMk cId="3767000517" sldId="2145706307"/>
@@ -258,7 +258,7 @@
         </pc:spChg>
       </pc:sldChg>
       <pc:sldChg chg="addSp delSp modSp mod">
-        <pc:chgData name="Graf Thomas, SCS-INI-NET-VNC-E2E" userId="487bc3e3-9ce7-4cdd-b7b4-8899ea88d289" providerId="ADAL" clId="{ADEEF08A-D719-4B50-A383-4105EDA2C206}" dt="2026-07-11T08:34:58.302" v="1249" actId="20577"/>
+        <pc:chgData name="Graf Thomas, SCS-INI-NET-VNC-E2E" userId="487bc3e3-9ce7-4cdd-b7b4-8899ea88d289" providerId="ADAL" clId="{ADEEF08A-D719-4B50-A383-4105EDA2C206}" dt="2026-07-11T08:46:16.481" v="1317" actId="20577"/>
         <pc:sldMkLst>
           <pc:docMk/>
           <pc:sldMk cId="1375384195" sldId="2145706308"/>
@@ -288,7 +288,7 @@
           </ac:spMkLst>
         </pc:spChg>
         <pc:spChg chg="mod">
-          <ac:chgData name="Graf Thomas, SCS-INI-NET-VNC-E2E" userId="487bc3e3-9ce7-4cdd-b7b4-8899ea88d289" providerId="ADAL" clId="{ADEEF08A-D719-4B50-A383-4105EDA2C206}" dt="2026-07-11T08:30:53.218" v="1216" actId="20577"/>
+          <ac:chgData name="Graf Thomas, SCS-INI-NET-VNC-E2E" userId="487bc3e3-9ce7-4cdd-b7b4-8899ea88d289" providerId="ADAL" clId="{ADEEF08A-D719-4B50-A383-4105EDA2C206}" dt="2026-07-11T08:46:16.481" v="1317" actId="20577"/>
           <ac:spMkLst>
             <pc:docMk/>
             <pc:sldMk cId="1375384195" sldId="2145706308"/>
@@ -5607,36 +5607,8 @@
               <a:buChar char="-"/>
             </a:pPr>
             <a:r>
-              <a:rPr lang="en-GB" sz="1400" dirty="0"/>
-              <a:t>“ </a:t>
-            </a:r>
-            <a:r>
               <a:rPr lang="en-US" sz="1400" dirty="0"/>
-              <a:t>topic-name</a:t>
-            </a:r>
-            <a:r>
-              <a:rPr lang="en-GB" sz="1400" dirty="0"/>
-              <a:t> “</a:t>
-            </a:r>
-            <a:r>
-              <a:rPr lang="en-US" sz="1400" dirty="0"/>
-              <a:t> and </a:t>
-            </a:r>
-            <a:r>
-              <a:rPr lang="en-GB" sz="1400" dirty="0"/>
-              <a:t>“ </a:t>
-            </a:r>
-            <a:r>
-              <a:rPr lang="en-US" sz="1400" dirty="0"/>
-              <a:t>subject-name</a:t>
-            </a:r>
-            <a:r>
-              <a:rPr lang="en-GB" sz="1400" dirty="0"/>
-              <a:t> “</a:t>
-            </a:r>
-            <a:r>
-              <a:rPr lang="en-US" sz="1400" dirty="0"/>
-              <a:t> leaves have now their own message broker typedefs aligning with </a:t>
+              <a:t>"topic-name" and "subject-name" leaves have now their own message broker typedefs aligning with </a:t>
             </a:r>
             <a:r>
               <a:rPr lang="en-US" sz="1400" dirty="0">
@@ -5668,7 +5640,55 @@
               </a:rPr>
               <a:t>-yang-message-broker-message-key</a:t>
             </a:r>
-            <a:endParaRPr lang="en-GB" sz="1400" dirty="0"/>
+            <a:r>
+              <a:rPr lang="en-US" sz="1400" dirty="0"/>
+              <a:t>.</a:t>
+            </a:r>
+          </a:p>
+          <a:p>
+            <a:pPr lvl="1">
+              <a:spcBef>
+                <a:spcPts val="225"/>
+              </a:spcBef>
+              <a:spcAft>
+                <a:spcPts val="225"/>
+              </a:spcAft>
+              <a:buFontTx/>
+              <a:buChar char="-"/>
+            </a:pPr>
+            <a:r>
+              <a:rPr lang="en-US" sz="1400" dirty="0"/>
+              <a:t>Uses "</a:t>
+            </a:r>
+            <a:r>
+              <a:rPr lang="en-US" sz="1400" dirty="0" err="1"/>
+              <a:t>ietf</a:t>
+            </a:r>
+            <a:r>
+              <a:rPr lang="en-US" sz="1400" dirty="0"/>
+              <a:t>-yang-types " and " </a:t>
+            </a:r>
+            <a:r>
+              <a:rPr lang="en-US" sz="1400" dirty="0" err="1"/>
+              <a:t>ietf</a:t>
+            </a:r>
+            <a:r>
+              <a:rPr lang="en-US" sz="1400" dirty="0"/>
+              <a:t>-</a:t>
+            </a:r>
+            <a:r>
+              <a:rPr lang="en-US" sz="1400" dirty="0" err="1"/>
+              <a:t>inet</a:t>
+            </a:r>
+            <a:r>
+              <a:rPr lang="en-US" sz="1400" dirty="0"/>
+              <a:t>-types " from RFC 9911 instead of </a:t>
+            </a:r>
+            <a:r>
+              <a:rPr lang="de-CH" sz="1400" dirty="0"/>
+              <a:t>6991bis.</a:t>
+            </a:r>
+            <a:endParaRPr lang="en-US" sz="1400" dirty="0"/>
           </a:p>
         </p:txBody>
       </p:sp>
@@ -12708,6 +12728,51 @@
               <a:rPr lang="en-US" sz="1400" dirty="0"/>
               <a:t>Updated YANG prefix names.</a:t>
             </a:r>
+          </a:p>
+          <a:p>
+            <a:pPr lvl="1">
+              <a:spcBef>
+                <a:spcPts val="225"/>
+              </a:spcBef>
+              <a:spcAft>
+                <a:spcPts val="225"/>
+              </a:spcAft>
+              <a:buFontTx/>
+              <a:buChar char="-"/>
+            </a:pPr>
+            <a:r>
+              <a:rPr lang="en-US" sz="1400" dirty="0"/>
+              <a:t>Uses "</a:t>
+            </a:r>
+            <a:r>
+              <a:rPr lang="en-US" sz="1400" dirty="0" err="1"/>
+              <a:t>ietf</a:t>
+            </a:r>
+            <a:r>
+              <a:rPr lang="en-US" sz="1400" dirty="0"/>
+              <a:t>-yang-types " and " </a:t>
+            </a:r>
+            <a:r>
+              <a:rPr lang="en-US" sz="1400" dirty="0" err="1"/>
+              <a:t>ietf</a:t>
+            </a:r>
+            <a:r>
+              <a:rPr lang="en-US" sz="1400" dirty="0"/>
+              <a:t>-</a:t>
+            </a:r>
+            <a:r>
+              <a:rPr lang="en-US" sz="1400" dirty="0" err="1"/>
+              <a:t>inet</a:t>
+            </a:r>
+            <a:r>
+              <a:rPr lang="en-US" sz="1400" dirty="0"/>
+              <a:t>-types " from RFC 9911 instead of </a:t>
+            </a:r>
+            <a:r>
+              <a:rPr lang="de-CH" sz="1400" dirty="0"/>
+              <a:t>6991bis.</a:t>
+            </a:r>
+            <a:endParaRPr lang="en-US" sz="1400" dirty="0"/>
           </a:p>
           <a:p>
             <a:pPr>
